--- a/tests/fixtures/good_unsupported.pptx
+++ b/tests/fixtures/good_unsupported.pptx
@@ -34,6 +34,10 @@
         </p:txBody>
       </p:sp>
       <p:graphicFrame>
+        <p:xfrm>
+          <a:off x="2000000" y="3000000"/>
+          <a:ext cx="6000000" cy="2000000"/>
+        </p:xfrm>
         <a:graphic>
           <a:graphicData uri="http://schemas.openxmlformats.org/drawingml/2006/table">
             <a:tbl>
